--- a/assets/pptx/catalog-452.pptx
+++ b/assets/pptx/catalog-452.pptx
@@ -3556,7 +3556,7 @@
                 <a:ea typeface="Ebrima"/>
                 <a:cs typeface="Ebrima"/>
               </a:rPr>
-              <a:t>እሮጣለሁ እስከመጨረሻ (2x)</a:t>
+              <a:t>እሮጣለሁ እስከመጨረሻ 2x</a:t>
             </a:r>
           </a:p>
           <a:p>
